--- a/modulo-2/PF1821-agentes-low-code/produccion/videos/AE3-capsula.pptx
+++ b/modulo-2/PF1821-agentes-low-code/produccion/videos/AE3-capsula.pptx
@@ -18,6 +18,8 @@
     <p:sldId id="263" r:id="rId17"/>
     <p:sldId id="264" r:id="rId18"/>
     <p:sldId id="265" r:id="rId19"/>
+    <p:sldId id="266" r:id="rId20"/>
+    <p:sldId id="267" r:id="rId21"/>
   </p:sldIdLst>
   <p:sldSz cx="12192000" cy="6858000"/>
   <p:notesSz cx="6858000" cy="9144000"/>
@@ -161,7 +163,7 @@
           <a:p>
             <a:r>
               <a:rPr lang="es-CL" dirty="0"/>
-              <a:t>Te doy la bienvenida a la cápsula 3 del módulo 2: Datos en movimiento. "Datos limpios, workflows confiables".</a:t>
+              <a:t>Te doy la bienvenida a la cápsula 3 del módulo 2, Fundamentos de n8n y manipulación de datos: Datos en movimiento. "Datos limpios, workflows confiables".</a:t>
             </a:r>
           </a:p>
         </p:txBody>
@@ -220,6 +222,124 @@
           <a:p>
             <a:r>
               <a:rPr lang="es-CL" dirty="0"/>
+              <a:t>Supabase en 5 minutos. Base de datos PostgreSQL en la nube: proyecto, luego tabla con columnas y tipos, luego credencial en n8n (URL del proyecto y clave de servicio, que nunca se pega en un nodo ni en una captura).</a:t>
+            </a:r>
+          </a:p>
+        </p:txBody>
+      </p:sp>
+    </p:spTree>
+  </p:cSld>
+  <p:clrMapOvr>
+    <a:masterClrMapping/>
+  </p:clrMapOvr>
+</p:notes>
+</file>
+
+<file path=ppt/notesSlides/notesSlide11.xml><?xml version="1.0" encoding="utf-8"?>
+<p:notes xmlns:a="http://schemas.openxmlformats.org/drawingml/2006/main" xmlns:r="http://schemas.openxmlformats.org/officeDocument/2006/relationships" xmlns:p="http://schemas.openxmlformats.org/presentationml/2006/main">
+  <p:cSld>
+    <p:spTree>
+      <p:nvGrpSpPr>
+        <p:cNvPr id="1" name=""/>
+        <p:cNvGrpSpPr/>
+        <p:nvPr/>
+      </p:nvGrpSpPr>
+      <p:grpSpPr>
+        <a:xfrm>
+          <a:off x="0" y="0"/>
+          <a:ext cx="0" cy="0"/>
+          <a:chOff x="0" y="0"/>
+          <a:chExt cx="0" cy="0"/>
+        </a:xfrm>
+      </p:grpSpPr>
+      <p:sp>
+        <p:nvSpPr>
+          <p:cNvPr id="2" name="Imagen de diapositiva"/>
+          <p:cNvSpPr>
+            <a:spLocks noGrp="1" noRot="1" noChangeAspect="1"/>
+          </p:cNvSpPr>
+          <p:nvPr>
+            <p:ph type="sldImg"/>
+          </p:nvPr>
+        </p:nvSpPr>
+        <p:spPr/>
+      </p:sp>
+      <p:sp>
+        <p:nvSpPr>
+          <p:cNvPr id="3" name="Notas"/>
+          <p:cNvSpPr>
+            <a:spLocks noGrp="1"/>
+          </p:cNvSpPr>
+          <p:nvPr>
+            <p:ph type="body" idx="1"/>
+          </p:nvPr>
+        </p:nvSpPr>
+        <p:spPr/>
+        <p:txBody>
+          <a:bodyPr/>
+          <a:lstStyle/>
+          <a:p>
+            <a:r>
+              <a:rPr lang="es-CL" dirty="0"/>
+              <a:t>CRUD con el nodo Supabase. Create a row, Get a row o Get many rows, Update a row, Delete a row. Datos relacionales: una devolución guarda el id de su pedido.</a:t>
+            </a:r>
+          </a:p>
+        </p:txBody>
+      </p:sp>
+    </p:spTree>
+  </p:cSld>
+  <p:clrMapOvr>
+    <a:masterClrMapping/>
+  </p:clrMapOvr>
+</p:notes>
+</file>
+
+<file path=ppt/notesSlides/notesSlide12.xml><?xml version="1.0" encoding="utf-8"?>
+<p:notes xmlns:a="http://schemas.openxmlformats.org/drawingml/2006/main" xmlns:r="http://schemas.openxmlformats.org/officeDocument/2006/relationships" xmlns:p="http://schemas.openxmlformats.org/presentationml/2006/main">
+  <p:cSld>
+    <p:spTree>
+      <p:nvGrpSpPr>
+        <p:cNvPr id="1" name=""/>
+        <p:cNvGrpSpPr/>
+        <p:nvPr/>
+      </p:nvGrpSpPr>
+      <p:grpSpPr>
+        <a:xfrm>
+          <a:off x="0" y="0"/>
+          <a:ext cx="0" cy="0"/>
+          <a:chOff x="0" y="0"/>
+          <a:chExt cx="0" cy="0"/>
+        </a:xfrm>
+      </p:grpSpPr>
+      <p:sp>
+        <p:nvSpPr>
+          <p:cNvPr id="2" name="Imagen de diapositiva"/>
+          <p:cNvSpPr>
+            <a:spLocks noGrp="1" noRot="1" noChangeAspect="1"/>
+          </p:cNvSpPr>
+          <p:nvPr>
+            <p:ph type="sldImg"/>
+          </p:nvPr>
+        </p:nvSpPr>
+        <p:spPr/>
+      </p:sp>
+      <p:sp>
+        <p:nvSpPr>
+          <p:cNvPr id="3" name="Notas"/>
+          <p:cNvSpPr>
+            <a:spLocks noGrp="1"/>
+          </p:cNvSpPr>
+          <p:nvPr>
+            <p:ph type="body" idx="1"/>
+          </p:nvPr>
+        </p:nvSpPr>
+        <p:spPr/>
+        <p:txBody>
+          <a:bodyPr/>
+          <a:lstStyle/>
+          <a:p>
+            <a:r>
+              <a:rPr lang="es-CL" dirty="0"/>
               <a:t>Tu tarea. Actividad 1, parte C: resumen por comuna en XML, y la tabla pedidos con tus filas.</a:t>
             </a:r>
           </a:p>
@@ -279,7 +399,7 @@
           <a:p>
             <a:r>
               <a:rPr lang="es-CL" dirty="0"/>
-              <a:t>Cómo viajan los datos. Cada ítem es un objeto JSON con campos; un nodo puede recibir muchos ítems y procesa cada uno. Arrays y objetos anidados.</a:t>
+              <a:t>Esta cápsula corresponde al aprendizaje esperado 3 del plan formativo: Manipular datos utilizando nodos fundamentales de n8n, para transformar información según requerimientos específicos del workflow. Sus criterios de evaluación son: Manipula datos utilizando nodos fundamentales de n8n, para transformar información según requerimientos específicos del workflow. Implementa transformaciones de datos entre formatos JSON, CSV y XML. Aplica expresiones n8n para procesar y filtrar información. Conecta bases de datos básicas usando Supabase, de acuerdo con los requerimientos del workflow.</a:t>
             </a:r>
           </a:p>
         </p:txBody>
@@ -338,7 +458,7 @@
           <a:p>
             <a:r>
               <a:rPr lang="es-CL" dirty="0"/>
-              <a:t>Nodos core de transformación. Edit Fields (Set): crear, cambiar o quitar campos, Filter: dejar pasar solo lo que cumple, Summarize: agrupar y sumar, contar, promediar, Split Out: separar una lista en ítems, Merge: unir dos flujos (por campo o por posición), If / Switch: se ven en el tramo 4.</a:t>
+              <a:t>Cómo viajan los datos. Cada ítem es un objeto JSON con campos; un nodo puede recibir muchos ítems y procesa cada uno. Arrays y objetos anidados.</a:t>
             </a:r>
           </a:p>
         </p:txBody>
@@ -397,7 +517,7 @@
           <a:p>
             <a:r>
               <a:rPr lang="es-CL" dirty="0"/>
-              <a:t>Expresiones. Entre {{ }}. $json.campo (datos del nodo), $('Nombre del nodo').item.json.campo (datos de otro nodo), $now (fecha y hora), métodos de texto y número: trim(), toLowerCase(), Number(), toFixed(). La vista previa muestra el resultado antes de ejecutar.</a:t>
+              <a:t>Nodos core (1): modificar, filtrar y resumir. Edit Fields (Set): crear, cambiar o quitar campos, Filter: dejar pasar solo lo que cumple, Summarize: agrupar y sumar, contar, promediar.</a:t>
             </a:r>
           </a:p>
         </p:txBody>
@@ -456,7 +576,7 @@
           <a:p>
             <a:r>
               <a:rPr lang="es-CL" dirty="0"/>
-              <a:t>Tipos de datos. Texto, número, booleano, fecha. Un número guardado como texto suma mal y la base de datos lo rechaza. Declarar el tipo en Edit Fields.</a:t>
+              <a:t>Nodos core (2): dividir, combinar y decidir. Split Out: separar una lista en ítems, Merge: unir dos flujos (por campo o por posición), If o Switch: enviar cada ítem por un camino según una condición (If: dos caminos; Switch: varios). La lógica condicional se profundiza en la cápsula 4.</a:t>
             </a:r>
           </a:p>
         </p:txBody>
@@ -515,7 +635,7 @@
           <a:p>
             <a:r>
               <a:rPr lang="es-CL" dirty="0"/>
-              <a:t>Formatos. JSON (nativo de n8n), CSV (Extract from File para leerlo, Convert to File para generarlo), XML (nodo XML, de JSON a XML y de vuelta).</a:t>
+              <a:t>Expresiones. Entre dobles llaves. json punto campo (datos del nodo), la referencia a otro nodo por su nombre (datos de otro nodo), now (fecha y hora), métodos de texto y número: trim, toLowerCase, Number, toFixed. La vista previa muestra el resultado antes de ejecutar.</a:t>
             </a:r>
           </a:p>
         </p:txBody>
@@ -574,7 +694,7 @@
           <a:p>
             <a:r>
               <a:rPr lang="es-CL" dirty="0"/>
-              <a:t>Variables y configuración. Valores que no se escriben a mano en cada nodo: credenciales guardadas y variables del entorno de la instancia, cuando el administrador lo habilita.</a:t>
+              <a:t>Tipos de datos. Texto, número, booleano, fecha. Un número guardado como texto suma mal y la base de datos lo rechaza. Declarar el tipo en Edit Fields.</a:t>
             </a:r>
           </a:p>
         </p:txBody>
@@ -633,7 +753,7 @@
           <a:p>
             <a:r>
               <a:rPr lang="es-CL" dirty="0"/>
-              <a:t>Supabase en 5 minutos. Base de datos PostgreSQL en la nube: proyecto, luego tabla con columnas y tipos, luego credencial en n8n (URL del proyecto y clave de servicio, que nunca se pega en un nodo ni en una captura).</a:t>
+              <a:t>Formatos. JSON (nativo de n8n), CSV (Extract from File para leerlo, Convert to File para generarlo), XML (nodo XML, de JSON a XML y de vuelta).</a:t>
             </a:r>
           </a:p>
         </p:txBody>
@@ -692,7 +812,7 @@
           <a:p>
             <a:r>
               <a:rPr lang="es-CL" dirty="0"/>
-              <a:t>CRUD con el nodo Supabase. Create a row, Get a row / Get many rows, Update a row, Delete a row. Datos relacionales: una devolución guarda el id de su pedido.</a:t>
+              <a:t>Variables y configuración. Valores que no se escriben a mano en cada nodo: credenciales guardadas y variables del entorno de la instancia, cuando el administrador lo habilita.</a:t>
             </a:r>
           </a:p>
         </p:txBody>
@@ -841,6 +961,39 @@
       </p:sp>
       <p:sp>
         <p:nvSpPr>
+          <p:cNvPr id="7" name="Etiqueta"/>
+          <p:cNvSpPr txBox="1"/>
+          <p:nvPr/>
+        </p:nvSpPr>
+        <p:spPr>
+          <a:xfrm>
+            <a:off x="609600" y="609600"/>
+            <a:ext cx="7315200" cy="533400"/>
+          </a:xfrm>
+          <a:prstGeom prst="rect">
+            <a:avLst/>
+          </a:prstGeom>
+          <a:noFill/>
+        </p:spPr>
+        <p:txBody>
+          <a:bodyPr wrap="square" lIns="0" rIns="0" anchor="b">
+            <a:normAutofit/>
+          </a:bodyPr>
+          <a:lstStyle/>
+          <a:p>
+            <a:r>
+              <a:rPr lang="es-CL" sz="1200" b="1" dirty="0">
+                <a:solidFill>
+                  <a:srgbClr val="9FC3E6"/>
+                </a:solidFill>
+              </a:rPr>
+              <a:t>MÓDULO 2 · FUNDAMENTOS DE N8N Y MANIPULACIÓN DE DATOS</a:t>
+            </a:r>
+          </a:p>
+        </p:txBody>
+      </p:sp>
+      <p:sp>
+        <p:nvSpPr>
           <p:cNvPr id="4" name="Título"/>
           <p:cNvSpPr txBox="1"/>
           <p:nvPr/>
@@ -903,6 +1056,16 @@
               <a:t>"Datos limpios, workflows confiables".</a:t>
             </a:r>
           </a:p>
+          <a:p>
+            <a:r>
+              <a:rPr lang="es-CL" sz="2200" dirty="0">
+                <a:solidFill>
+                  <a:srgbClr val="E5E7EB"/>
+                </a:solidFill>
+              </a:rPr>
+              <a:t>Contenido del plan: 3. NODOS CORE DE N8N Y MANIPULACIÓN DE DATOS</a:t>
+            </a:r>
+          </a:p>
         </p:txBody>
       </p:sp>
       <p:sp>
@@ -933,7 +1096,7 @@
                   <a:srgbClr val="CBD5E1"/>
                 </a:solidFill>
               </a:rPr>
-              <a:t>PF1821 · Módulo 2 · Cápsula 3 · AE3</a:t>
+              <a:t>PF1821 · Módulo 2 · Cápsula 3 · Aprendizaje esperado 3</a:t>
             </a:r>
           </a:p>
         </p:txBody>
@@ -987,14 +1150,67 @@
       </p:sp>
       <p:sp>
         <p:nvSpPr>
+          <p:cNvPr id="7" name="Etiqueta"/>
+          <p:cNvSpPr txBox="1"/>
+          <p:nvPr/>
+        </p:nvSpPr>
+        <p:spPr>
+          <a:xfrm>
+            <a:off x="609600" y="228600"/>
+            <a:ext cx="7315200" cy="914400"/>
+          </a:xfrm>
+          <a:prstGeom prst="rect">
+            <a:avLst/>
+          </a:prstGeom>
+          <a:noFill/>
+        </p:spPr>
+        <p:txBody>
+          <a:bodyPr wrap="square" lIns="0" rIns="0" anchor="b">
+            <a:normAutofit/>
+          </a:bodyPr>
+          <a:lstStyle/>
+          <a:p>
+            <a:r>
+              <a:rPr lang="es-CL" sz="1200" b="1" dirty="0">
+                <a:solidFill>
+                  <a:srgbClr val="0E7490"/>
+                </a:solidFill>
+              </a:rPr>
+              <a:t>CONTENIDO DEL PLAN (TEXTUAL)</a:t>
+            </a:r>
+          </a:p>
+          <a:p>
+            <a:r>
+              <a:rPr lang="es-CL" sz="1200" b="1" dirty="0">
+                <a:solidFill>
+                  <a:srgbClr val="0F3D5E"/>
+                </a:solidFill>
+              </a:rPr>
+              <a:t>INTEGRACIÓN CON BASES DE DATOS.</a:t>
+            </a:r>
+          </a:p>
+          <a:p>
+            <a:r>
+              <a:rPr lang="es-CL" sz="1200" b="1" dirty="0">
+                <a:solidFill>
+                  <a:srgbClr val="0F3D5E"/>
+                </a:solidFill>
+              </a:rPr>
+              <a:t>SUPABASE: CONFIGURACIÓN BÁSICA.</a:t>
+            </a:r>
+          </a:p>
+        </p:txBody>
+      </p:sp>
+      <p:sp>
+        <p:nvSpPr>
           <p:cNvPr id="3" name="Título"/>
           <p:cNvSpPr txBox="1"/>
           <p:nvPr/>
         </p:nvSpPr>
         <p:spPr>
           <a:xfrm>
-            <a:off x="609600" y="381000"/>
-            <a:ext cx="7315200" cy="990600"/>
+            <a:off x="609600" y="1181100"/>
+            <a:ext cx="7315200" cy="685800"/>
           </a:xfrm>
           <a:prstGeom prst="rect">
             <a:avLst/>
@@ -1008,12 +1224,12 @@
           <a:lstStyle/>
           <a:p>
             <a:r>
-              <a:rPr lang="es-CL" sz="3200" b="1" dirty="0">
+              <a:rPr lang="es-CL" sz="2800" b="1" dirty="0">
                 <a:solidFill>
                   <a:srgbClr val="0F3D5E"/>
                 </a:solidFill>
               </a:rPr>
-              <a:t>Tu tarea</a:t>
+              <a:t>Supabase en 5 minutos</a:t>
             </a:r>
           </a:p>
         </p:txBody>
@@ -1026,7 +1242,7 @@
         </p:nvSpPr>
         <p:spPr>
           <a:xfrm>
-            <a:off x="609600" y="1447800"/>
+            <a:off x="609600" y="1943100"/>
             <a:ext cx="1066800" cy="50800"/>
           </a:xfrm>
           <a:prstGeom prst="rect">
@@ -1048,8 +1264,8 @@
         </p:nvSpPr>
         <p:spPr>
           <a:xfrm>
-            <a:off x="609600" y="1676400"/>
-            <a:ext cx="7315200" cy="4419600"/>
+            <a:off x="609600" y="2095500"/>
+            <a:ext cx="7315200" cy="4000500"/>
           </a:xfrm>
           <a:prstGeom prst="rect">
             <a:avLst/>
@@ -1078,7 +1294,23 @@
                   <a:srgbClr val="1F2937"/>
                 </a:solidFill>
               </a:rPr>
-              <a:t>Actividad 1, parte C: resumen por comuna en XML, y la tabla pedidos con tus filas.</a:t>
+              <a:t>Base de datos PostgreSQL en la nube: proyecto → tabla con columnas y tipos → credencial en n8n (URL del proyecto y clave de servicio, que </a:t>
+            </a:r>
+            <a:r>
+              <a:rPr lang="es-CL" sz="2400" b="1" dirty="0">
+                <a:solidFill>
+                  <a:srgbClr val="1F2937"/>
+                </a:solidFill>
+              </a:rPr>
+              <a:t>nunca</a:t>
+            </a:r>
+            <a:r>
+              <a:rPr lang="es-CL" sz="2400" dirty="0">
+                <a:solidFill>
+                  <a:srgbClr val="1F2937"/>
+                </a:solidFill>
+              </a:rPr>
+              <a:t> se pega en un nodo ni en una captura).</a:t>
             </a:r>
           </a:p>
         </p:txBody>
@@ -1111,7 +1343,469 @@
                   <a:srgbClr val="6B7280"/>
                 </a:solidFill>
               </a:rPr>
-              <a:t>PF1821 · Módulo 2 · Cápsula 3 · AE3</a:t>
+              <a:t>PF1821 · Módulo 2 · Cápsula 3 · Aprendizaje esperado 3</a:t>
+            </a:r>
+          </a:p>
+        </p:txBody>
+      </p:sp>
+    </p:spTree>
+  </p:cSld>
+  <p:clrMapOvr>
+    <a:masterClrMapping/>
+  </p:clrMapOvr>
+</p:sld>
+</file>
+
+<file path=ppt/slides/slide11.xml><?xml version="1.0" encoding="utf-8"?>
+<p:sld xmlns:a="http://schemas.openxmlformats.org/drawingml/2006/main" xmlns:r="http://schemas.openxmlformats.org/officeDocument/2006/relationships" xmlns:p="http://schemas.openxmlformats.org/presentationml/2006/main">
+  <p:cSld>
+    <p:spTree>
+      <p:nvGrpSpPr>
+        <p:cNvPr id="1" name=""/>
+        <p:cNvGrpSpPr/>
+        <p:nvPr/>
+      </p:nvGrpSpPr>
+      <p:grpSpPr>
+        <a:xfrm>
+          <a:off x="0" y="0"/>
+          <a:ext cx="0" cy="0"/>
+          <a:chOff x="0" y="0"/>
+          <a:chExt cx="0" cy="0"/>
+        </a:xfrm>
+      </p:grpSpPr>
+      <p:sp>
+        <p:nvSpPr>
+          <p:cNvPr id="2" name="Franja 2"/>
+          <p:cNvSpPr/>
+          <p:nvPr/>
+        </p:nvSpPr>
+        <p:spPr>
+          <a:xfrm>
+            <a:off x="0" y="0"/>
+            <a:ext cx="12192000" cy="152400"/>
+          </a:xfrm>
+          <a:prstGeom prst="rect">
+            <a:avLst/>
+          </a:prstGeom>
+          <a:solidFill>
+            <a:srgbClr val="0E7490"/>
+          </a:solidFill>
+          <a:ln>
+            <a:noFill/>
+          </a:ln>
+        </p:spPr>
+      </p:sp>
+      <p:sp>
+        <p:nvSpPr>
+          <p:cNvPr id="7" name="Etiqueta"/>
+          <p:cNvSpPr txBox="1"/>
+          <p:nvPr/>
+        </p:nvSpPr>
+        <p:spPr>
+          <a:xfrm>
+            <a:off x="609600" y="228600"/>
+            <a:ext cx="7315200" cy="914400"/>
+          </a:xfrm>
+          <a:prstGeom prst="rect">
+            <a:avLst/>
+          </a:prstGeom>
+          <a:noFill/>
+        </p:spPr>
+        <p:txBody>
+          <a:bodyPr wrap="square" lIns="0" rIns="0" anchor="b">
+            <a:normAutofit/>
+          </a:bodyPr>
+          <a:lstStyle/>
+          <a:p>
+            <a:r>
+              <a:rPr lang="es-CL" sz="1200" b="1" dirty="0">
+                <a:solidFill>
+                  <a:srgbClr val="0E7490"/>
+                </a:solidFill>
+              </a:rPr>
+              <a:t>CONTENIDO DEL PLAN (TEXTUAL)</a:t>
+            </a:r>
+          </a:p>
+          <a:p>
+            <a:r>
+              <a:rPr lang="es-CL" sz="1200" b="1" dirty="0">
+                <a:solidFill>
+                  <a:srgbClr val="0F3D5E"/>
+                </a:solidFill>
+              </a:rPr>
+              <a:t>OPERACIONES CRUD BÁSICAS.</a:t>
+            </a:r>
+          </a:p>
+          <a:p>
+            <a:r>
+              <a:rPr lang="es-CL" sz="1200" b="1" dirty="0">
+                <a:solidFill>
+                  <a:srgbClr val="0F3D5E"/>
+                </a:solidFill>
+              </a:rPr>
+              <a:t>MANEJO DE DATOS RELACIONALES</a:t>
+            </a:r>
+          </a:p>
+        </p:txBody>
+      </p:sp>
+      <p:sp>
+        <p:nvSpPr>
+          <p:cNvPr id="3" name="Título"/>
+          <p:cNvSpPr txBox="1"/>
+          <p:nvPr/>
+        </p:nvSpPr>
+        <p:spPr>
+          <a:xfrm>
+            <a:off x="609600" y="1181100"/>
+            <a:ext cx="7315200" cy="685800"/>
+          </a:xfrm>
+          <a:prstGeom prst="rect">
+            <a:avLst/>
+          </a:prstGeom>
+          <a:noFill/>
+        </p:spPr>
+        <p:txBody>
+          <a:bodyPr wrap="square" lIns="0" rIns="0" anchor="b">
+            <a:normAutofit/>
+          </a:bodyPr>
+          <a:lstStyle/>
+          <a:p>
+            <a:r>
+              <a:rPr lang="es-CL" sz="2800" b="1" dirty="0">
+                <a:solidFill>
+                  <a:srgbClr val="0F3D5E"/>
+                </a:solidFill>
+              </a:rPr>
+              <a:t>CRUD con el nodo Supabase</a:t>
+            </a:r>
+          </a:p>
+        </p:txBody>
+      </p:sp>
+      <p:sp>
+        <p:nvSpPr>
+          <p:cNvPr id="4" name="Franja 4"/>
+          <p:cNvSpPr/>
+          <p:nvPr/>
+        </p:nvSpPr>
+        <p:spPr>
+          <a:xfrm>
+            <a:off x="609600" y="1943100"/>
+            <a:ext cx="1066800" cy="50800"/>
+          </a:xfrm>
+          <a:prstGeom prst="rect">
+            <a:avLst/>
+          </a:prstGeom>
+          <a:solidFill>
+            <a:srgbClr val="F59E0B"/>
+          </a:solidFill>
+          <a:ln>
+            <a:noFill/>
+          </a:ln>
+        </p:spPr>
+      </p:sp>
+      <p:sp>
+        <p:nvSpPr>
+          <p:cNvPr id="5" name="Contenido"/>
+          <p:cNvSpPr txBox="1"/>
+          <p:nvPr/>
+        </p:nvSpPr>
+        <p:spPr>
+          <a:xfrm>
+            <a:off x="609600" y="2095500"/>
+            <a:ext cx="7315200" cy="4000500"/>
+          </a:xfrm>
+          <a:prstGeom prst="rect">
+            <a:avLst/>
+          </a:prstGeom>
+          <a:noFill/>
+        </p:spPr>
+        <p:txBody>
+          <a:bodyPr wrap="square" lIns="0" rIns="0" anchor="t">
+            <a:normAutofit/>
+          </a:bodyPr>
+          <a:lstStyle/>
+          <a:p>
+            <a:pPr marL="342900" indent="-342900">
+              <a:spcBef>
+                <a:spcPts val="900"/>
+              </a:spcBef>
+              <a:buClr>
+                <a:srgbClr val="0E7490"/>
+              </a:buClr>
+              <a:buFont typeface="Arial"/>
+              <a:buChar char="•"/>
+            </a:pPr>
+            <a:r>
+              <a:rPr lang="es-CL" sz="2400" dirty="0">
+                <a:solidFill>
+                  <a:srgbClr val="1F2937"/>
+                </a:solidFill>
+              </a:rPr>
+              <a:t>Create a row · Get a row / Get many rows · Update a row · Delete a row.</a:t>
+            </a:r>
+          </a:p>
+          <a:p>
+            <a:pPr marL="342900" indent="-342900">
+              <a:spcBef>
+                <a:spcPts val="900"/>
+              </a:spcBef>
+              <a:buClr>
+                <a:srgbClr val="0E7490"/>
+              </a:buClr>
+              <a:buFont typeface="Arial"/>
+              <a:buChar char="•"/>
+            </a:pPr>
+            <a:r>
+              <a:rPr lang="es-CL" sz="2400" dirty="0">
+                <a:solidFill>
+                  <a:srgbClr val="1F2937"/>
+                </a:solidFill>
+              </a:rPr>
+              <a:t>Datos relacionales: una devolución guarda el id de su pedido.</a:t>
+            </a:r>
+          </a:p>
+        </p:txBody>
+      </p:sp>
+      <p:sp>
+        <p:nvSpPr>
+          <p:cNvPr id="6" name="Pie"/>
+          <p:cNvSpPr txBox="1"/>
+          <p:nvPr/>
+        </p:nvSpPr>
+        <p:spPr>
+          <a:xfrm>
+            <a:off x="609600" y="6248400"/>
+            <a:ext cx="7315200" cy="381000"/>
+          </a:xfrm>
+          <a:prstGeom prst="rect">
+            <a:avLst/>
+          </a:prstGeom>
+          <a:noFill/>
+        </p:spPr>
+        <p:txBody>
+          <a:bodyPr wrap="square" lIns="0" rIns="0" anchor="t">
+            <a:normAutofit/>
+          </a:bodyPr>
+          <a:lstStyle/>
+          <a:p>
+            <a:r>
+              <a:rPr lang="es-CL" sz="1200" dirty="0">
+                <a:solidFill>
+                  <a:srgbClr val="6B7280"/>
+                </a:solidFill>
+              </a:rPr>
+              <a:t>PF1821 · Módulo 2 · Cápsula 3 · Aprendizaje esperado 3</a:t>
+            </a:r>
+          </a:p>
+        </p:txBody>
+      </p:sp>
+    </p:spTree>
+  </p:cSld>
+  <p:clrMapOvr>
+    <a:masterClrMapping/>
+  </p:clrMapOvr>
+</p:sld>
+</file>
+
+<file path=ppt/slides/slide12.xml><?xml version="1.0" encoding="utf-8"?>
+<p:sld xmlns:a="http://schemas.openxmlformats.org/drawingml/2006/main" xmlns:r="http://schemas.openxmlformats.org/officeDocument/2006/relationships" xmlns:p="http://schemas.openxmlformats.org/presentationml/2006/main">
+  <p:cSld>
+    <p:spTree>
+      <p:nvGrpSpPr>
+        <p:cNvPr id="1" name=""/>
+        <p:cNvGrpSpPr/>
+        <p:nvPr/>
+      </p:nvGrpSpPr>
+      <p:grpSpPr>
+        <a:xfrm>
+          <a:off x="0" y="0"/>
+          <a:ext cx="0" cy="0"/>
+          <a:chOff x="0" y="0"/>
+          <a:chExt cx="0" cy="0"/>
+        </a:xfrm>
+      </p:grpSpPr>
+      <p:sp>
+        <p:nvSpPr>
+          <p:cNvPr id="2" name="Franja 2"/>
+          <p:cNvSpPr/>
+          <p:nvPr/>
+        </p:nvSpPr>
+        <p:spPr>
+          <a:xfrm>
+            <a:off x="0" y="0"/>
+            <a:ext cx="12192000" cy="152400"/>
+          </a:xfrm>
+          <a:prstGeom prst="rect">
+            <a:avLst/>
+          </a:prstGeom>
+          <a:solidFill>
+            <a:srgbClr val="0E7490"/>
+          </a:solidFill>
+          <a:ln>
+            <a:noFill/>
+          </a:ln>
+        </p:spPr>
+      </p:sp>
+      <p:sp>
+        <p:nvSpPr>
+          <p:cNvPr id="7" name="Etiqueta"/>
+          <p:cNvSpPr txBox="1"/>
+          <p:nvPr/>
+        </p:nvSpPr>
+        <p:spPr>
+          <a:xfrm>
+            <a:off x="609600" y="228600"/>
+            <a:ext cx="7315200" cy="914400"/>
+          </a:xfrm>
+          <a:prstGeom prst="rect">
+            <a:avLst/>
+          </a:prstGeom>
+          <a:noFill/>
+        </p:spPr>
+        <p:txBody>
+          <a:bodyPr wrap="square" lIns="0" rIns="0" anchor="b">
+            <a:normAutofit/>
+          </a:bodyPr>
+          <a:lstStyle/>
+          <a:p>
+            <a:r>
+              <a:rPr lang="es-CL" sz="1200" b="1" dirty="0">
+                <a:solidFill>
+                  <a:srgbClr val="0E7490"/>
+                </a:solidFill>
+              </a:rPr>
+              <a:t>PRÁCTICA DEL APRENDIZAJE ESPERADO 3</a:t>
+            </a:r>
+          </a:p>
+        </p:txBody>
+      </p:sp>
+      <p:sp>
+        <p:nvSpPr>
+          <p:cNvPr id="3" name="Título"/>
+          <p:cNvSpPr txBox="1"/>
+          <p:nvPr/>
+        </p:nvSpPr>
+        <p:spPr>
+          <a:xfrm>
+            <a:off x="609600" y="1181100"/>
+            <a:ext cx="7315200" cy="685800"/>
+          </a:xfrm>
+          <a:prstGeom prst="rect">
+            <a:avLst/>
+          </a:prstGeom>
+          <a:noFill/>
+        </p:spPr>
+        <p:txBody>
+          <a:bodyPr wrap="square" lIns="0" rIns="0" anchor="b">
+            <a:normAutofit/>
+          </a:bodyPr>
+          <a:lstStyle/>
+          <a:p>
+            <a:r>
+              <a:rPr lang="es-CL" sz="2800" b="1" dirty="0">
+                <a:solidFill>
+                  <a:srgbClr val="0F3D5E"/>
+                </a:solidFill>
+              </a:rPr>
+              <a:t>Tu tarea</a:t>
+            </a:r>
+          </a:p>
+        </p:txBody>
+      </p:sp>
+      <p:sp>
+        <p:nvSpPr>
+          <p:cNvPr id="4" name="Franja 4"/>
+          <p:cNvSpPr/>
+          <p:nvPr/>
+        </p:nvSpPr>
+        <p:spPr>
+          <a:xfrm>
+            <a:off x="609600" y="1943100"/>
+            <a:ext cx="1066800" cy="50800"/>
+          </a:xfrm>
+          <a:prstGeom prst="rect">
+            <a:avLst/>
+          </a:prstGeom>
+          <a:solidFill>
+            <a:srgbClr val="F59E0B"/>
+          </a:solidFill>
+          <a:ln>
+            <a:noFill/>
+          </a:ln>
+        </p:spPr>
+      </p:sp>
+      <p:sp>
+        <p:nvSpPr>
+          <p:cNvPr id="5" name="Contenido"/>
+          <p:cNvSpPr txBox="1"/>
+          <p:nvPr/>
+        </p:nvSpPr>
+        <p:spPr>
+          <a:xfrm>
+            <a:off x="609600" y="2095500"/>
+            <a:ext cx="7315200" cy="4000500"/>
+          </a:xfrm>
+          <a:prstGeom prst="rect">
+            <a:avLst/>
+          </a:prstGeom>
+          <a:noFill/>
+        </p:spPr>
+        <p:txBody>
+          <a:bodyPr wrap="square" lIns="0" rIns="0" anchor="t">
+            <a:normAutofit/>
+          </a:bodyPr>
+          <a:lstStyle/>
+          <a:p>
+            <a:pPr marL="342900" indent="-342900">
+              <a:spcBef>
+                <a:spcPts val="900"/>
+              </a:spcBef>
+              <a:buClr>
+                <a:srgbClr val="0E7490"/>
+              </a:buClr>
+              <a:buFont typeface="Arial"/>
+              <a:buChar char="•"/>
+            </a:pPr>
+            <a:r>
+              <a:rPr lang="es-CL" sz="2400" dirty="0">
+                <a:solidFill>
+                  <a:srgbClr val="1F2937"/>
+                </a:solidFill>
+              </a:rPr>
+              <a:t>Actividad 1, parte C: resumen por comuna en XML, y la tabla pedidos con tus filas.</a:t>
+            </a:r>
+          </a:p>
+        </p:txBody>
+      </p:sp>
+      <p:sp>
+        <p:nvSpPr>
+          <p:cNvPr id="6" name="Pie"/>
+          <p:cNvSpPr txBox="1"/>
+          <p:nvPr/>
+        </p:nvSpPr>
+        <p:spPr>
+          <a:xfrm>
+            <a:off x="609600" y="6248400"/>
+            <a:ext cx="7315200" cy="381000"/>
+          </a:xfrm>
+          <a:prstGeom prst="rect">
+            <a:avLst/>
+          </a:prstGeom>
+          <a:noFill/>
+        </p:spPr>
+        <p:txBody>
+          <a:bodyPr wrap="square" lIns="0" rIns="0" anchor="t">
+            <a:normAutofit/>
+          </a:bodyPr>
+          <a:lstStyle/>
+          <a:p>
+            <a:r>
+              <a:rPr lang="es-CL" sz="1200" dirty="0">
+                <a:solidFill>
+                  <a:srgbClr val="6B7280"/>
+                </a:solidFill>
+              </a:rPr>
+              <a:t>PF1821 · Módulo 2 · Cápsula 3 · Aprendizaje esperado 3</a:t>
             </a:r>
           </a:p>
         </p:txBody>
@@ -1165,14 +1859,47 @@
       </p:sp>
       <p:sp>
         <p:nvSpPr>
+          <p:cNvPr id="7" name="Etiqueta"/>
+          <p:cNvSpPr txBox="1"/>
+          <p:nvPr/>
+        </p:nvSpPr>
+        <p:spPr>
+          <a:xfrm>
+            <a:off x="609600" y="228600"/>
+            <a:ext cx="7315200" cy="914400"/>
+          </a:xfrm>
+          <a:prstGeom prst="rect">
+            <a:avLst/>
+          </a:prstGeom>
+          <a:noFill/>
+        </p:spPr>
+        <p:txBody>
+          <a:bodyPr wrap="square" lIns="0" rIns="0" anchor="b">
+            <a:normAutofit/>
+          </a:bodyPr>
+          <a:lstStyle/>
+          <a:p>
+            <a:r>
+              <a:rPr lang="es-CL" sz="1200" b="1" dirty="0">
+                <a:solidFill>
+                  <a:srgbClr val="0E7490"/>
+                </a:solidFill>
+              </a:rPr>
+              <a:t>APRENDIZAJE Y CRITERIOS TEXTUALES DEL PLAN FORMATIVO</a:t>
+            </a:r>
+          </a:p>
+        </p:txBody>
+      </p:sp>
+      <p:sp>
+        <p:nvSpPr>
           <p:cNvPr id="3" name="Título"/>
           <p:cNvSpPr txBox="1"/>
           <p:nvPr/>
         </p:nvSpPr>
         <p:spPr>
           <a:xfrm>
-            <a:off x="609600" y="381000"/>
-            <a:ext cx="7315200" cy="990600"/>
+            <a:off x="609600" y="1181100"/>
+            <a:ext cx="7315200" cy="685800"/>
           </a:xfrm>
           <a:prstGeom prst="rect">
             <a:avLst/>
@@ -1186,12 +1913,12 @@
           <a:lstStyle/>
           <a:p>
             <a:r>
-              <a:rPr lang="es-CL" sz="3200" b="1" dirty="0">
+              <a:rPr lang="es-CL" sz="2800" b="1" dirty="0">
                 <a:solidFill>
                   <a:srgbClr val="0F3D5E"/>
                 </a:solidFill>
               </a:rPr>
-              <a:t>Cómo viajan los datos</a:t>
+              <a:t>Aprendizaje esperado 3</a:t>
             </a:r>
           </a:p>
         </p:txBody>
@@ -1204,7 +1931,7 @@
         </p:nvSpPr>
         <p:spPr>
           <a:xfrm>
-            <a:off x="609600" y="1447800"/>
+            <a:off x="609600" y="1943100"/>
             <a:ext cx="1066800" cy="50800"/>
           </a:xfrm>
           <a:prstGeom prst="rect">
@@ -1226,8 +1953,8 @@
         </p:nvSpPr>
         <p:spPr>
           <a:xfrm>
-            <a:off x="609600" y="1676400"/>
-            <a:ext cx="7315200" cy="4419600"/>
+            <a:off x="609600" y="2095500"/>
+            <a:ext cx="7315200" cy="4000500"/>
           </a:xfrm>
           <a:prstGeom prst="rect">
             <a:avLst/>
@@ -1251,12 +1978,28 @@
               <a:buChar char="•"/>
             </a:pPr>
             <a:r>
-              <a:rPr lang="es-CL" sz="2400" dirty="0">
+              <a:rPr lang="es-CL" sz="1400" b="1" dirty="0">
                 <a:solidFill>
                   <a:srgbClr val="1F2937"/>
                 </a:solidFill>
               </a:rPr>
-              <a:t>Cada ítem es un objeto JSON con campos; un nodo puede recibir muchos ítems y procesa cada uno.</a:t>
+              <a:t>MANIPULAR DATOS UTILIZANDO NODOS FUNDAMENTALES DE N8N, PARA TRANSFORMAR INFORMACIÓN SEGÚN REQUERIMIENTOS ESPECÍFICOS DEL WORKFLOW.</a:t>
+            </a:r>
+          </a:p>
+          <a:p>
+            <a:pPr marL="0" indent="0">
+              <a:spcBef>
+                <a:spcPts val="1400"/>
+              </a:spcBef>
+              <a:buNone/>
+            </a:pPr>
+            <a:r>
+              <a:rPr lang="es-CL" sz="1200" b="1" dirty="0">
+                <a:solidFill>
+                  <a:srgbClr val="0E7490"/>
+                </a:solidFill>
+              </a:rPr>
+              <a:t>CRITERIOS DE EVALUACIÓN</a:t>
             </a:r>
           </a:p>
           <a:p>
@@ -1271,12 +2014,72 @@
               <a:buChar char="•"/>
             </a:pPr>
             <a:r>
-              <a:rPr lang="es-CL" sz="2400" dirty="0">
+              <a:rPr lang="es-CL" sz="1400" dirty="0">
                 <a:solidFill>
                   <a:srgbClr val="1F2937"/>
                 </a:solidFill>
               </a:rPr>
-              <a:t>Arrays y objetos anidados.</a:t>
+              <a:t>3.1 MANIPULA DATOS UTILIZANDO NODOS FUNDAMENTALES DE N8N, PARA TRANSFORMAR INFORMACIÓN SEGÚN REQUERIMIENTOS ESPECÍFICOS DEL WORKFLOW.</a:t>
+            </a:r>
+          </a:p>
+          <a:p>
+            <a:pPr marL="342900" indent="-342900">
+              <a:spcBef>
+                <a:spcPts val="900"/>
+              </a:spcBef>
+              <a:buClr>
+                <a:srgbClr val="0E7490"/>
+              </a:buClr>
+              <a:buFont typeface="Arial"/>
+              <a:buChar char="•"/>
+            </a:pPr>
+            <a:r>
+              <a:rPr lang="es-CL" sz="1400" dirty="0">
+                <a:solidFill>
+                  <a:srgbClr val="1F2937"/>
+                </a:solidFill>
+              </a:rPr>
+              <a:t>3.2 IMPLEMENTA TRANSFORMACIONES DE DATOS ENTRE FORMATOS JSON, CSV Y XML.</a:t>
+            </a:r>
+          </a:p>
+          <a:p>
+            <a:pPr marL="342900" indent="-342900">
+              <a:spcBef>
+                <a:spcPts val="900"/>
+              </a:spcBef>
+              <a:buClr>
+                <a:srgbClr val="0E7490"/>
+              </a:buClr>
+              <a:buFont typeface="Arial"/>
+              <a:buChar char="•"/>
+            </a:pPr>
+            <a:r>
+              <a:rPr lang="es-CL" sz="1400" dirty="0">
+                <a:solidFill>
+                  <a:srgbClr val="1F2937"/>
+                </a:solidFill>
+              </a:rPr>
+              <a:t>3.3 APLICA EXPRESIONES N8N PARA PROCESAR Y FILTRAR INFORMACIÓN.</a:t>
+            </a:r>
+          </a:p>
+          <a:p>
+            <a:pPr marL="342900" indent="-342900">
+              <a:spcBef>
+                <a:spcPts val="900"/>
+              </a:spcBef>
+              <a:buClr>
+                <a:srgbClr val="0E7490"/>
+              </a:buClr>
+              <a:buFont typeface="Arial"/>
+              <a:buChar char="•"/>
+            </a:pPr>
+            <a:r>
+              <a:rPr lang="es-CL" sz="1400" dirty="0">
+                <a:solidFill>
+                  <a:srgbClr val="1F2937"/>
+                </a:solidFill>
+              </a:rPr>
+              <a:t>3.4 CONECTA BASES DE DATOS BÁSICAS USANDO SUPABASE, DE ACUERDO CON LOS REQUERIMIENTOS DEL WORKFLOW.</a:t>
             </a:r>
           </a:p>
         </p:txBody>
@@ -1309,7 +2112,7 @@
                   <a:srgbClr val="6B7280"/>
                 </a:solidFill>
               </a:rPr>
-              <a:t>PF1821 · Módulo 2 · Cápsula 3 · AE3</a:t>
+              <a:t>PF1821 · Módulo 2 · Cápsula 3 · Aprendizaje esperado 3</a:t>
             </a:r>
           </a:p>
         </p:txBody>
@@ -1363,14 +2166,67 @@
       </p:sp>
       <p:sp>
         <p:nvSpPr>
+          <p:cNvPr id="7" name="Etiqueta"/>
+          <p:cNvSpPr txBox="1"/>
+          <p:nvPr/>
+        </p:nvSpPr>
+        <p:spPr>
+          <a:xfrm>
+            <a:off x="609600" y="228600"/>
+            <a:ext cx="7315200" cy="914400"/>
+          </a:xfrm>
+          <a:prstGeom prst="rect">
+            <a:avLst/>
+          </a:prstGeom>
+          <a:noFill/>
+        </p:spPr>
+        <p:txBody>
+          <a:bodyPr wrap="square" lIns="0" rIns="0" anchor="b">
+            <a:normAutofit/>
+          </a:bodyPr>
+          <a:lstStyle/>
+          <a:p>
+            <a:r>
+              <a:rPr lang="es-CL" sz="1200" b="1" dirty="0">
+                <a:solidFill>
+                  <a:srgbClr val="0E7490"/>
+                </a:solidFill>
+              </a:rPr>
+              <a:t>CONTENIDO DEL PLAN (TEXTUAL)</a:t>
+            </a:r>
+          </a:p>
+          <a:p>
+            <a:r>
+              <a:rPr lang="es-CL" sz="1200" b="1" dirty="0">
+                <a:solidFill>
+                  <a:srgbClr val="0F3D5E"/>
+                </a:solidFill>
+              </a:rPr>
+              <a:t>MANIPULACIÓN DE DATOS.</a:t>
+            </a:r>
+          </a:p>
+          <a:p>
+            <a:r>
+              <a:rPr lang="es-CL" sz="1200" b="1" dirty="0">
+                <a:solidFill>
+                  <a:srgbClr val="0F3D5E"/>
+                </a:solidFill>
+              </a:rPr>
+              <a:t>MANEJO DE ARRAYS Y OBJETOS.</a:t>
+            </a:r>
+          </a:p>
+        </p:txBody>
+      </p:sp>
+      <p:sp>
+        <p:nvSpPr>
           <p:cNvPr id="3" name="Título"/>
           <p:cNvSpPr txBox="1"/>
           <p:nvPr/>
         </p:nvSpPr>
         <p:spPr>
           <a:xfrm>
-            <a:off x="609600" y="381000"/>
-            <a:ext cx="7315200" cy="990600"/>
+            <a:off x="609600" y="1181100"/>
+            <a:ext cx="7315200" cy="685800"/>
           </a:xfrm>
           <a:prstGeom prst="rect">
             <a:avLst/>
@@ -1384,12 +2240,12 @@
           <a:lstStyle/>
           <a:p>
             <a:r>
-              <a:rPr lang="es-CL" sz="3200" b="1" dirty="0">
+              <a:rPr lang="es-CL" sz="2800" b="1" dirty="0">
                 <a:solidFill>
                   <a:srgbClr val="0F3D5E"/>
                 </a:solidFill>
               </a:rPr>
-              <a:t>Nodos core de transformación</a:t>
+              <a:t>Cómo viajan los datos</a:t>
             </a:r>
           </a:p>
         </p:txBody>
@@ -1402,7 +2258,7 @@
         </p:nvSpPr>
         <p:spPr>
           <a:xfrm>
-            <a:off x="609600" y="1447800"/>
+            <a:off x="609600" y="1943100"/>
             <a:ext cx="1066800" cy="50800"/>
           </a:xfrm>
           <a:prstGeom prst="rect">
@@ -1424,8 +2280,8 @@
         </p:nvSpPr>
         <p:spPr>
           <a:xfrm>
-            <a:off x="609600" y="1676400"/>
-            <a:ext cx="7315200" cy="4419600"/>
+            <a:off x="609600" y="2095500"/>
+            <a:ext cx="7315200" cy="4000500"/>
           </a:xfrm>
           <a:prstGeom prst="rect">
             <a:avLst/>
@@ -1449,100 +2305,32 @@
               <a:buChar char="•"/>
             </a:pPr>
             <a:r>
-              <a:rPr lang="es-CL" sz="2000" b="1" dirty="0">
+              <a:rPr lang="es-CL" sz="2400" dirty="0">
                 <a:solidFill>
                   <a:srgbClr val="1F2937"/>
                 </a:solidFill>
               </a:rPr>
-              <a:t>Edit Fields (Set)</a:t>
-            </a:r>
-            <a:r>
-              <a:rPr lang="es-CL" sz="2000" dirty="0">
+              <a:t>Cada ítem es un objeto JSON con campos; un nodo puede recibir muchos ítems y procesa cada uno.</a:t>
+            </a:r>
+          </a:p>
+          <a:p>
+            <a:pPr marL="342900" indent="-342900">
+              <a:spcBef>
+                <a:spcPts val="900"/>
+              </a:spcBef>
+              <a:buClr>
+                <a:srgbClr val="0E7490"/>
+              </a:buClr>
+              <a:buFont typeface="Arial"/>
+              <a:buChar char="•"/>
+            </a:pPr>
+            <a:r>
+              <a:rPr lang="es-CL" sz="2400" dirty="0">
                 <a:solidFill>
                   <a:srgbClr val="1F2937"/>
                 </a:solidFill>
               </a:rPr>
-              <a:t>: crear, cambiar o quitar campos · </a:t>
-            </a:r>
-            <a:r>
-              <a:rPr lang="es-CL" sz="2000" b="1" dirty="0">
-                <a:solidFill>
-                  <a:srgbClr val="1F2937"/>
-                </a:solidFill>
-              </a:rPr>
-              <a:t>Filter</a:t>
-            </a:r>
-            <a:r>
-              <a:rPr lang="es-CL" sz="2000" dirty="0">
-                <a:solidFill>
-                  <a:srgbClr val="1F2937"/>
-                </a:solidFill>
-              </a:rPr>
-              <a:t>: dejar pasar solo lo que cumple · </a:t>
-            </a:r>
-            <a:r>
-              <a:rPr lang="es-CL" sz="2000" b="1" dirty="0">
-                <a:solidFill>
-                  <a:srgbClr val="1F2937"/>
-                </a:solidFill>
-              </a:rPr>
-              <a:t>Summarize</a:t>
-            </a:r>
-            <a:r>
-              <a:rPr lang="es-CL" sz="2000" dirty="0">
-                <a:solidFill>
-                  <a:srgbClr val="1F2937"/>
-                </a:solidFill>
-              </a:rPr>
-              <a:t>: agrupar y sumar, contar, promediar · </a:t>
-            </a:r>
-            <a:r>
-              <a:rPr lang="es-CL" sz="2000" b="1" dirty="0">
-                <a:solidFill>
-                  <a:srgbClr val="1F2937"/>
-                </a:solidFill>
-              </a:rPr>
-              <a:t>Split Out</a:t>
-            </a:r>
-            <a:r>
-              <a:rPr lang="es-CL" sz="2000" dirty="0">
-                <a:solidFill>
-                  <a:srgbClr val="1F2937"/>
-                </a:solidFill>
-              </a:rPr>
-              <a:t>: separar una lista en ítems · </a:t>
-            </a:r>
-            <a:r>
-              <a:rPr lang="es-CL" sz="2000" b="1" dirty="0">
-                <a:solidFill>
-                  <a:srgbClr val="1F2937"/>
-                </a:solidFill>
-              </a:rPr>
-              <a:t>Merge</a:t>
-            </a:r>
-            <a:r>
-              <a:rPr lang="es-CL" sz="2000" dirty="0">
-                <a:solidFill>
-                  <a:srgbClr val="1F2937"/>
-                </a:solidFill>
-              </a:rPr>
-              <a:t>: unir dos flujos (por campo o por posición) · </a:t>
-            </a:r>
-            <a:r>
-              <a:rPr lang="es-CL" sz="2000" b="1" dirty="0">
-                <a:solidFill>
-                  <a:srgbClr val="1F2937"/>
-                </a:solidFill>
-              </a:rPr>
-              <a:t>If / Switch</a:t>
-            </a:r>
-            <a:r>
-              <a:rPr lang="es-CL" sz="2000" dirty="0">
-                <a:solidFill>
-                  <a:srgbClr val="1F2937"/>
-                </a:solidFill>
-              </a:rPr>
-              <a:t>: se ven en el tramo 4.</a:t>
+              <a:t>Arrays y objetos anidados.</a:t>
             </a:r>
           </a:p>
         </p:txBody>
@@ -1575,7 +2363,7 @@
                   <a:srgbClr val="6B7280"/>
                 </a:solidFill>
               </a:rPr>
-              <a:t>PF1821 · Módulo 2 · Cápsula 3 · AE3</a:t>
+              <a:t>PF1821 · Módulo 2 · Cápsula 3 · Aprendizaje esperado 3</a:t>
             </a:r>
           </a:p>
         </p:txBody>
@@ -1629,14 +2417,77 @@
       </p:sp>
       <p:sp>
         <p:nvSpPr>
+          <p:cNvPr id="7" name="Etiqueta"/>
+          <p:cNvSpPr txBox="1"/>
+          <p:nvPr/>
+        </p:nvSpPr>
+        <p:spPr>
+          <a:xfrm>
+            <a:off x="609600" y="228600"/>
+            <a:ext cx="7315200" cy="914400"/>
+          </a:xfrm>
+          <a:prstGeom prst="rect">
+            <a:avLst/>
+          </a:prstGeom>
+          <a:noFill/>
+        </p:spPr>
+        <p:txBody>
+          <a:bodyPr wrap="square" lIns="0" rIns="0" anchor="b">
+            <a:normAutofit/>
+          </a:bodyPr>
+          <a:lstStyle/>
+          <a:p>
+            <a:r>
+              <a:rPr lang="es-CL" sz="1100" b="1" dirty="0">
+                <a:solidFill>
+                  <a:srgbClr val="0E7490"/>
+                </a:solidFill>
+              </a:rPr>
+              <a:t>CONTENIDO DEL PLAN (TEXTUAL)</a:t>
+            </a:r>
+          </a:p>
+          <a:p>
+            <a:r>
+              <a:rPr lang="es-CL" sz="1100" b="1" dirty="0">
+                <a:solidFill>
+                  <a:srgbClr val="0F3D5E"/>
+                </a:solidFill>
+              </a:rPr>
+              <a:t>SET: MODIFICACIÓN DE DATOS.</a:t>
+            </a:r>
+          </a:p>
+          <a:p>
+            <a:r>
+              <a:rPr lang="es-CL" sz="1100" b="1" dirty="0">
+                <a:solidFill>
+                  <a:srgbClr val="0F3D5E"/>
+                </a:solidFill>
+              </a:rPr>
+              <a:t>FILTER: FILTRADO DE DATOS.</a:t>
+            </a:r>
+          </a:p>
+          <a:p>
+            <a:r>
+              <a:rPr lang="es-CL" sz="1100" b="1" dirty="0">
+                <a:solidFill>
+                  <a:srgbClr val="0F3D5E"/>
+                </a:solidFill>
+              </a:rPr>
+              <a:t>SUMMARIZE: AGREGACIÓN DE DATOS.</a:t>
+            </a:r>
+          </a:p>
+        </p:txBody>
+      </p:sp>
+      <p:sp>
+        <p:nvSpPr>
           <p:cNvPr id="3" name="Título"/>
           <p:cNvSpPr txBox="1"/>
           <p:nvPr/>
         </p:nvSpPr>
         <p:spPr>
           <a:xfrm>
-            <a:off x="609600" y="381000"/>
-            <a:ext cx="7315200" cy="990600"/>
+            <a:off x="609600" y="1181100"/>
+            <a:ext cx="7315200" cy="685800"/>
           </a:xfrm>
           <a:prstGeom prst="rect">
             <a:avLst/>
@@ -1650,12 +2501,12 @@
           <a:lstStyle/>
           <a:p>
             <a:r>
-              <a:rPr lang="es-CL" sz="3200" b="1" dirty="0">
+              <a:rPr lang="es-CL" sz="2800" b="1" dirty="0">
                 <a:solidFill>
                   <a:srgbClr val="0F3D5E"/>
                 </a:solidFill>
               </a:rPr>
-              <a:t>Expresiones</a:t>
+              <a:t>Nodos core (1): modificar, filtrar y resumir</a:t>
             </a:r>
           </a:p>
         </p:txBody>
@@ -1668,7 +2519,7 @@
         </p:nvSpPr>
         <p:spPr>
           <a:xfrm>
-            <a:off x="609600" y="1447800"/>
+            <a:off x="609600" y="1943100"/>
             <a:ext cx="1066800" cy="50800"/>
           </a:xfrm>
           <a:prstGeom prst="rect">
@@ -1690,8 +2541,8 @@
         </p:nvSpPr>
         <p:spPr>
           <a:xfrm>
-            <a:off x="609600" y="1676400"/>
-            <a:ext cx="7315200" cy="4419600"/>
+            <a:off x="609600" y="2095500"/>
+            <a:ext cx="7315200" cy="4000500"/>
           </a:xfrm>
           <a:prstGeom prst="rect">
             <a:avLst/>
@@ -1715,52 +2566,52 @@
               <a:buChar char="•"/>
             </a:pPr>
             <a:r>
-              <a:rPr lang="es-CL" sz="2000" dirty="0">
+              <a:rPr lang="es-CL" sz="2400" b="1" dirty="0">
                 <a:solidFill>
                   <a:srgbClr val="1F2937"/>
                 </a:solidFill>
               </a:rPr>
-              <a:t>Entre {{ }}.</a:t>
-            </a:r>
-          </a:p>
-          <a:p>
-            <a:pPr marL="342900" indent="-342900">
-              <a:spcBef>
-                <a:spcPts val="900"/>
-              </a:spcBef>
-              <a:buClr>
-                <a:srgbClr val="0E7490"/>
-              </a:buClr>
-              <a:buFont typeface="Arial"/>
-              <a:buChar char="•"/>
-            </a:pPr>
-            <a:r>
-              <a:rPr lang="es-CL" sz="2000" dirty="0">
+              <a:t>Edit Fields (Set)</a:t>
+            </a:r>
+            <a:r>
+              <a:rPr lang="es-CL" sz="2400" dirty="0">
                 <a:solidFill>
                   <a:srgbClr val="1F2937"/>
                 </a:solidFill>
               </a:rPr>
-              <a:t>$json.campo (datos del nodo) · $('Nombre del nodo').item.json.campo (datos de otro nodo) · $now (fecha y hora) · métodos de texto y número: trim(), toLowerCase(), Number(), toFixed().</a:t>
-            </a:r>
-          </a:p>
-          <a:p>
-            <a:pPr marL="342900" indent="-342900">
-              <a:spcBef>
-                <a:spcPts val="900"/>
-              </a:spcBef>
-              <a:buClr>
-                <a:srgbClr val="0E7490"/>
-              </a:buClr>
-              <a:buFont typeface="Arial"/>
-              <a:buChar char="•"/>
-            </a:pPr>
-            <a:r>
-              <a:rPr lang="es-CL" sz="2000" dirty="0">
+              <a:t>: crear, cambiar o quitar campos · </a:t>
+            </a:r>
+            <a:r>
+              <a:rPr lang="es-CL" sz="2400" b="1" dirty="0">
                 <a:solidFill>
                   <a:srgbClr val="1F2937"/>
                 </a:solidFill>
               </a:rPr>
-              <a:t>La vista previa muestra el resultado antes de ejecutar.</a:t>
+              <a:t>Filter</a:t>
+            </a:r>
+            <a:r>
+              <a:rPr lang="es-CL" sz="2400" dirty="0">
+                <a:solidFill>
+                  <a:srgbClr val="1F2937"/>
+                </a:solidFill>
+              </a:rPr>
+              <a:t>: dejar pasar solo lo que cumple · </a:t>
+            </a:r>
+            <a:r>
+              <a:rPr lang="es-CL" sz="2400" b="1" dirty="0">
+                <a:solidFill>
+                  <a:srgbClr val="1F2937"/>
+                </a:solidFill>
+              </a:rPr>
+              <a:t>Summarize</a:t>
+            </a:r>
+            <a:r>
+              <a:rPr lang="es-CL" sz="2400" dirty="0">
+                <a:solidFill>
+                  <a:srgbClr val="1F2937"/>
+                </a:solidFill>
+              </a:rPr>
+              <a:t>: agrupar y sumar, contar, promediar.</a:t>
             </a:r>
           </a:p>
         </p:txBody>
@@ -1793,7 +2644,7 @@
                   <a:srgbClr val="6B7280"/>
                 </a:solidFill>
               </a:rPr>
-              <a:t>PF1821 · Módulo 2 · Cápsula 3 · AE3</a:t>
+              <a:t>PF1821 · Módulo 2 · Cápsula 3 · Aprendizaje esperado 3</a:t>
             </a:r>
           </a:p>
         </p:txBody>
@@ -1847,14 +2698,77 @@
       </p:sp>
       <p:sp>
         <p:nvSpPr>
+          <p:cNvPr id="7" name="Etiqueta"/>
+          <p:cNvSpPr txBox="1"/>
+          <p:nvPr/>
+        </p:nvSpPr>
+        <p:spPr>
+          <a:xfrm>
+            <a:off x="609600" y="228600"/>
+            <a:ext cx="7315200" cy="914400"/>
+          </a:xfrm>
+          <a:prstGeom prst="rect">
+            <a:avLst/>
+          </a:prstGeom>
+          <a:noFill/>
+        </p:spPr>
+        <p:txBody>
+          <a:bodyPr wrap="square" lIns="0" rIns="0" anchor="b">
+            <a:normAutofit/>
+          </a:bodyPr>
+          <a:lstStyle/>
+          <a:p>
+            <a:r>
+              <a:rPr lang="es-CL" sz="1100" b="1" dirty="0">
+                <a:solidFill>
+                  <a:srgbClr val="0E7490"/>
+                </a:solidFill>
+              </a:rPr>
+              <a:t>CONTENIDO DEL PLAN (TEXTUAL)</a:t>
+            </a:r>
+          </a:p>
+          <a:p>
+            <a:r>
+              <a:rPr lang="es-CL" sz="1100" b="1" dirty="0">
+                <a:solidFill>
+                  <a:srgbClr val="0F3D5E"/>
+                </a:solidFill>
+              </a:rPr>
+              <a:t>SPLIT: DIVISIÓN DE DATOS.</a:t>
+            </a:r>
+          </a:p>
+          <a:p>
+            <a:r>
+              <a:rPr lang="es-CL" sz="1100" b="1" dirty="0">
+                <a:solidFill>
+                  <a:srgbClr val="0F3D5E"/>
+                </a:solidFill>
+              </a:rPr>
+              <a:t>MERGE: COMBINACIÓN DE DATOS.</a:t>
+            </a:r>
+          </a:p>
+          <a:p>
+            <a:r>
+              <a:rPr lang="es-CL" sz="1100" b="1" dirty="0">
+                <a:solidFill>
+                  <a:srgbClr val="0F3D5E"/>
+                </a:solidFill>
+              </a:rPr>
+              <a:t>IF/SWITCH: LÓGICA CONDICIONAL.</a:t>
+            </a:r>
+          </a:p>
+        </p:txBody>
+      </p:sp>
+      <p:sp>
+        <p:nvSpPr>
           <p:cNvPr id="3" name="Título"/>
           <p:cNvSpPr txBox="1"/>
           <p:nvPr/>
         </p:nvSpPr>
         <p:spPr>
           <a:xfrm>
-            <a:off x="609600" y="381000"/>
-            <a:ext cx="7315200" cy="990600"/>
+            <a:off x="609600" y="1181100"/>
+            <a:ext cx="7315200" cy="685800"/>
           </a:xfrm>
           <a:prstGeom prst="rect">
             <a:avLst/>
@@ -1868,12 +2782,12 @@
           <a:lstStyle/>
           <a:p>
             <a:r>
-              <a:rPr lang="es-CL" sz="3200" b="1" dirty="0">
+              <a:rPr lang="es-CL" sz="2800" b="1" dirty="0">
                 <a:solidFill>
                   <a:srgbClr val="0F3D5E"/>
                 </a:solidFill>
               </a:rPr>
-              <a:t>Tipos de datos</a:t>
+              <a:t>Nodos core (2): dividir, combinar y decidir</a:t>
             </a:r>
           </a:p>
         </p:txBody>
@@ -1886,7 +2800,7 @@
         </p:nvSpPr>
         <p:spPr>
           <a:xfrm>
-            <a:off x="609600" y="1447800"/>
+            <a:off x="609600" y="1943100"/>
             <a:ext cx="1066800" cy="50800"/>
           </a:xfrm>
           <a:prstGeom prst="rect">
@@ -1908,8 +2822,8 @@
         </p:nvSpPr>
         <p:spPr>
           <a:xfrm>
-            <a:off x="609600" y="1676400"/>
-            <a:ext cx="7315200" cy="4419600"/>
+            <a:off x="609600" y="2095500"/>
+            <a:ext cx="7315200" cy="4000500"/>
           </a:xfrm>
           <a:prstGeom prst="rect">
             <a:avLst/>
@@ -1933,12 +2847,52 @@
               <a:buChar char="•"/>
             </a:pPr>
             <a:r>
-              <a:rPr lang="es-CL" sz="2400" dirty="0">
+              <a:rPr lang="es-CL" sz="2000" b="1" dirty="0">
                 <a:solidFill>
                   <a:srgbClr val="1F2937"/>
                 </a:solidFill>
               </a:rPr>
-              <a:t>Texto, número, booleano, fecha.</a:t>
+              <a:t>Split Out</a:t>
+            </a:r>
+            <a:r>
+              <a:rPr lang="es-CL" sz="2000" dirty="0">
+                <a:solidFill>
+                  <a:srgbClr val="1F2937"/>
+                </a:solidFill>
+              </a:rPr>
+              <a:t>: separar una lista en ítems · </a:t>
+            </a:r>
+            <a:r>
+              <a:rPr lang="es-CL" sz="2000" b="1" dirty="0">
+                <a:solidFill>
+                  <a:srgbClr val="1F2937"/>
+                </a:solidFill>
+              </a:rPr>
+              <a:t>Merge</a:t>
+            </a:r>
+            <a:r>
+              <a:rPr lang="es-CL" sz="2000" dirty="0">
+                <a:solidFill>
+                  <a:srgbClr val="1F2937"/>
+                </a:solidFill>
+              </a:rPr>
+              <a:t>: unir dos flujos (por campo o por posición) · </a:t>
+            </a:r>
+            <a:r>
+              <a:rPr lang="es-CL" sz="2000" b="1" dirty="0">
+                <a:solidFill>
+                  <a:srgbClr val="1F2937"/>
+                </a:solidFill>
+              </a:rPr>
+              <a:t>If / Switch</a:t>
+            </a:r>
+            <a:r>
+              <a:rPr lang="es-CL" sz="2000" dirty="0">
+                <a:solidFill>
+                  <a:srgbClr val="1F2937"/>
+                </a:solidFill>
+              </a:rPr>
+              <a:t>: enviar cada ítem por un camino según una condición (If: dos caminos; Switch: varios).</a:t>
             </a:r>
           </a:p>
           <a:p>
@@ -1953,32 +2907,12 @@
               <a:buChar char="•"/>
             </a:pPr>
             <a:r>
-              <a:rPr lang="es-CL" sz="2400" dirty="0">
+              <a:rPr lang="es-CL" sz="2000" dirty="0">
                 <a:solidFill>
                   <a:srgbClr val="1F2937"/>
                 </a:solidFill>
               </a:rPr>
-              <a:t>Un número guardado como texto suma mal y la base de datos lo rechaza.</a:t>
-            </a:r>
-          </a:p>
-          <a:p>
-            <a:pPr marL="342900" indent="-342900">
-              <a:spcBef>
-                <a:spcPts val="900"/>
-              </a:spcBef>
-              <a:buClr>
-                <a:srgbClr val="0E7490"/>
-              </a:buClr>
-              <a:buFont typeface="Arial"/>
-              <a:buChar char="•"/>
-            </a:pPr>
-            <a:r>
-              <a:rPr lang="es-CL" sz="2400" dirty="0">
-                <a:solidFill>
-                  <a:srgbClr val="1F2937"/>
-                </a:solidFill>
-              </a:rPr>
-              <a:t>Declarar el tipo en Edit Fields.</a:t>
+              <a:t>La lógica condicional se profundiza en la cápsula 4.</a:t>
             </a:r>
           </a:p>
         </p:txBody>
@@ -2011,7 +2945,7 @@
                   <a:srgbClr val="6B7280"/>
                 </a:solidFill>
               </a:rPr>
-              <a:t>PF1821 · Módulo 2 · Cápsula 3 · AE3</a:t>
+              <a:t>PF1821 · Módulo 2 · Cápsula 3 · Aprendizaje esperado 3</a:t>
             </a:r>
           </a:p>
         </p:txBody>
@@ -2065,14 +2999,57 @@
       </p:sp>
       <p:sp>
         <p:nvSpPr>
+          <p:cNvPr id="7" name="Etiqueta"/>
+          <p:cNvSpPr txBox="1"/>
+          <p:nvPr/>
+        </p:nvSpPr>
+        <p:spPr>
+          <a:xfrm>
+            <a:off x="609600" y="228600"/>
+            <a:ext cx="7315200" cy="914400"/>
+          </a:xfrm>
+          <a:prstGeom prst="rect">
+            <a:avLst/>
+          </a:prstGeom>
+          <a:noFill/>
+        </p:spPr>
+        <p:txBody>
+          <a:bodyPr wrap="square" lIns="0" rIns="0" anchor="b">
+            <a:normAutofit/>
+          </a:bodyPr>
+          <a:lstStyle/>
+          <a:p>
+            <a:r>
+              <a:rPr lang="es-CL" sz="1200" b="1" dirty="0">
+                <a:solidFill>
+                  <a:srgbClr val="0E7490"/>
+                </a:solidFill>
+              </a:rPr>
+              <a:t>CONTENIDO DEL PLAN (TEXTUAL)</a:t>
+            </a:r>
+          </a:p>
+          <a:p>
+            <a:r>
+              <a:rPr lang="es-CL" sz="1200" b="1" dirty="0">
+                <a:solidFill>
+                  <a:srgbClr val="0F3D5E"/>
+                </a:solidFill>
+              </a:rPr>
+              <a:t>EXPRESIONES N8N: SINTAXIS Y FUNCIONES.</a:t>
+            </a:r>
+          </a:p>
+        </p:txBody>
+      </p:sp>
+      <p:sp>
+        <p:nvSpPr>
           <p:cNvPr id="3" name="Título"/>
           <p:cNvSpPr txBox="1"/>
           <p:nvPr/>
         </p:nvSpPr>
         <p:spPr>
           <a:xfrm>
-            <a:off x="609600" y="381000"/>
-            <a:ext cx="7315200" cy="990600"/>
+            <a:off x="609600" y="1181100"/>
+            <a:ext cx="7315200" cy="685800"/>
           </a:xfrm>
           <a:prstGeom prst="rect">
             <a:avLst/>
@@ -2086,12 +3063,12 @@
           <a:lstStyle/>
           <a:p>
             <a:r>
-              <a:rPr lang="es-CL" sz="3200" b="1" dirty="0">
+              <a:rPr lang="es-CL" sz="2800" b="1" dirty="0">
                 <a:solidFill>
                   <a:srgbClr val="0F3D5E"/>
                 </a:solidFill>
               </a:rPr>
-              <a:t>Formatos</a:t>
+              <a:t>Expresiones</a:t>
             </a:r>
           </a:p>
         </p:txBody>
@@ -2104,7 +3081,7 @@
         </p:nvSpPr>
         <p:spPr>
           <a:xfrm>
-            <a:off x="609600" y="1447800"/>
+            <a:off x="609600" y="1943100"/>
             <a:ext cx="1066800" cy="50800"/>
           </a:xfrm>
           <a:prstGeom prst="rect">
@@ -2126,8 +3103,8 @@
         </p:nvSpPr>
         <p:spPr>
           <a:xfrm>
-            <a:off x="609600" y="1676400"/>
-            <a:ext cx="7315200" cy="4419600"/>
+            <a:off x="609600" y="2095500"/>
+            <a:ext cx="7315200" cy="4000500"/>
           </a:xfrm>
           <a:prstGeom prst="rect">
             <a:avLst/>
@@ -2151,52 +3128,52 @@
               <a:buChar char="•"/>
             </a:pPr>
             <a:r>
-              <a:rPr lang="es-CL" sz="2400" b="1" dirty="0">
+              <a:rPr lang="es-CL" sz="2000" dirty="0">
                 <a:solidFill>
                   <a:srgbClr val="1F2937"/>
                 </a:solidFill>
               </a:rPr>
-              <a:t>JSON</a:t>
-            </a:r>
-            <a:r>
-              <a:rPr lang="es-CL" sz="2400" dirty="0">
+              <a:t>Entre {{ }}.</a:t>
+            </a:r>
+          </a:p>
+          <a:p>
+            <a:pPr marL="342900" indent="-342900">
+              <a:spcBef>
+                <a:spcPts val="900"/>
+              </a:spcBef>
+              <a:buClr>
+                <a:srgbClr val="0E7490"/>
+              </a:buClr>
+              <a:buFont typeface="Arial"/>
+              <a:buChar char="•"/>
+            </a:pPr>
+            <a:r>
+              <a:rPr lang="es-CL" sz="2000" dirty="0">
                 <a:solidFill>
                   <a:srgbClr val="1F2937"/>
                 </a:solidFill>
               </a:rPr>
-              <a:t> (nativo de n8n) · </a:t>
-            </a:r>
-            <a:r>
-              <a:rPr lang="es-CL" sz="2400" b="1" dirty="0">
+              <a:t>$json.campo (datos del nodo) · $('Nombre del nodo').item.json.campo (datos de otro nodo) · $now (fecha y hora) · métodos de texto y número: trim(), toLowerCase(), Number(), toFixed().</a:t>
+            </a:r>
+          </a:p>
+          <a:p>
+            <a:pPr marL="342900" indent="-342900">
+              <a:spcBef>
+                <a:spcPts val="900"/>
+              </a:spcBef>
+              <a:buClr>
+                <a:srgbClr val="0E7490"/>
+              </a:buClr>
+              <a:buFont typeface="Arial"/>
+              <a:buChar char="•"/>
+            </a:pPr>
+            <a:r>
+              <a:rPr lang="es-CL" sz="2000" dirty="0">
                 <a:solidFill>
                   <a:srgbClr val="1F2937"/>
                 </a:solidFill>
               </a:rPr>
-              <a:t>CSV</a:t>
-            </a:r>
-            <a:r>
-              <a:rPr lang="es-CL" sz="2400" dirty="0">
-                <a:solidFill>
-                  <a:srgbClr val="1F2937"/>
-                </a:solidFill>
-              </a:rPr>
-              <a:t> (Extract from File para leerlo, Convert to File para generarlo) · </a:t>
-            </a:r>
-            <a:r>
-              <a:rPr lang="es-CL" sz="2400" b="1" dirty="0">
-                <a:solidFill>
-                  <a:srgbClr val="1F2937"/>
-                </a:solidFill>
-              </a:rPr>
-              <a:t>XML</a:t>
-            </a:r>
-            <a:r>
-              <a:rPr lang="es-CL" sz="2400" dirty="0">
-                <a:solidFill>
-                  <a:srgbClr val="1F2937"/>
-                </a:solidFill>
-              </a:rPr>
-              <a:t> (nodo XML, de JSON a XML y de vuelta).</a:t>
+              <a:t>La vista previa muestra el resultado antes de ejecutar.</a:t>
             </a:r>
           </a:p>
         </p:txBody>
@@ -2229,7 +3206,7 @@
                   <a:srgbClr val="6B7280"/>
                 </a:solidFill>
               </a:rPr>
-              <a:t>PF1821 · Módulo 2 · Cápsula 3 · AE3</a:t>
+              <a:t>PF1821 · Módulo 2 · Cápsula 3 · Aprendizaje esperado 3</a:t>
             </a:r>
           </a:p>
         </p:txBody>
@@ -2283,14 +3260,57 @@
       </p:sp>
       <p:sp>
         <p:nvSpPr>
+          <p:cNvPr id="7" name="Etiqueta"/>
+          <p:cNvSpPr txBox="1"/>
+          <p:nvPr/>
+        </p:nvSpPr>
+        <p:spPr>
+          <a:xfrm>
+            <a:off x="609600" y="228600"/>
+            <a:ext cx="7315200" cy="914400"/>
+          </a:xfrm>
+          <a:prstGeom prst="rect">
+            <a:avLst/>
+          </a:prstGeom>
+          <a:noFill/>
+        </p:spPr>
+        <p:txBody>
+          <a:bodyPr wrap="square" lIns="0" rIns="0" anchor="b">
+            <a:normAutofit/>
+          </a:bodyPr>
+          <a:lstStyle/>
+          <a:p>
+            <a:r>
+              <a:rPr lang="es-CL" sz="1200" b="1" dirty="0">
+                <a:solidFill>
+                  <a:srgbClr val="0E7490"/>
+                </a:solidFill>
+              </a:rPr>
+              <a:t>CONTENIDO DEL PLAN (TEXTUAL)</a:t>
+            </a:r>
+          </a:p>
+          <a:p>
+            <a:r>
+              <a:rPr lang="es-CL" sz="1200" b="1" dirty="0">
+                <a:solidFill>
+                  <a:srgbClr val="0F3D5E"/>
+                </a:solidFill>
+              </a:rPr>
+              <a:t>MANIPULACIÓN DE DATOS.</a:t>
+            </a:r>
+          </a:p>
+        </p:txBody>
+      </p:sp>
+      <p:sp>
+        <p:nvSpPr>
           <p:cNvPr id="3" name="Título"/>
           <p:cNvSpPr txBox="1"/>
           <p:nvPr/>
         </p:nvSpPr>
         <p:spPr>
           <a:xfrm>
-            <a:off x="609600" y="381000"/>
-            <a:ext cx="7315200" cy="990600"/>
+            <a:off x="609600" y="1181100"/>
+            <a:ext cx="7315200" cy="685800"/>
           </a:xfrm>
           <a:prstGeom prst="rect">
             <a:avLst/>
@@ -2304,12 +3324,12 @@
           <a:lstStyle/>
           <a:p>
             <a:r>
-              <a:rPr lang="es-CL" sz="3200" b="1" dirty="0">
+              <a:rPr lang="es-CL" sz="2800" b="1" dirty="0">
                 <a:solidFill>
                   <a:srgbClr val="0F3D5E"/>
                 </a:solidFill>
               </a:rPr>
-              <a:t>Variables y configuración</a:t>
+              <a:t>Tipos de datos</a:t>
             </a:r>
           </a:p>
         </p:txBody>
@@ -2322,7 +3342,7 @@
         </p:nvSpPr>
         <p:spPr>
           <a:xfrm>
-            <a:off x="609600" y="1447800"/>
+            <a:off x="609600" y="1943100"/>
             <a:ext cx="1066800" cy="50800"/>
           </a:xfrm>
           <a:prstGeom prst="rect">
@@ -2344,8 +3364,8 @@
         </p:nvSpPr>
         <p:spPr>
           <a:xfrm>
-            <a:off x="609600" y="1676400"/>
-            <a:ext cx="7315200" cy="4419600"/>
+            <a:off x="609600" y="2095500"/>
+            <a:ext cx="7315200" cy="4000500"/>
           </a:xfrm>
           <a:prstGeom prst="rect">
             <a:avLst/>
@@ -2374,7 +3394,47 @@
                   <a:srgbClr val="1F2937"/>
                 </a:solidFill>
               </a:rPr>
-              <a:t>Valores que no se escriben a mano en cada nodo: credenciales guardadas y variables del entorno de la instancia, cuando el administrador lo habilita.</a:t>
+              <a:t>Texto, número, booleano, fecha.</a:t>
+            </a:r>
+          </a:p>
+          <a:p>
+            <a:pPr marL="342900" indent="-342900">
+              <a:spcBef>
+                <a:spcPts val="900"/>
+              </a:spcBef>
+              <a:buClr>
+                <a:srgbClr val="0E7490"/>
+              </a:buClr>
+              <a:buFont typeface="Arial"/>
+              <a:buChar char="•"/>
+            </a:pPr>
+            <a:r>
+              <a:rPr lang="es-CL" sz="2400" dirty="0">
+                <a:solidFill>
+                  <a:srgbClr val="1F2937"/>
+                </a:solidFill>
+              </a:rPr>
+              <a:t>Un número guardado como texto suma mal y la base de datos lo rechaza.</a:t>
+            </a:r>
+          </a:p>
+          <a:p>
+            <a:pPr marL="342900" indent="-342900">
+              <a:spcBef>
+                <a:spcPts val="900"/>
+              </a:spcBef>
+              <a:buClr>
+                <a:srgbClr val="0E7490"/>
+              </a:buClr>
+              <a:buFont typeface="Arial"/>
+              <a:buChar char="•"/>
+            </a:pPr>
+            <a:r>
+              <a:rPr lang="es-CL" sz="2400" dirty="0">
+                <a:solidFill>
+                  <a:srgbClr val="1F2937"/>
+                </a:solidFill>
+              </a:rPr>
+              <a:t>Declarar el tipo en Edit Fields.</a:t>
             </a:r>
           </a:p>
         </p:txBody>
@@ -2407,7 +3467,7 @@
                   <a:srgbClr val="6B7280"/>
                 </a:solidFill>
               </a:rPr>
-              <a:t>PF1821 · Módulo 2 · Cápsula 3 · AE3</a:t>
+              <a:t>PF1821 · Módulo 2 · Cápsula 3 · Aprendizaje esperado 3</a:t>
             </a:r>
           </a:p>
         </p:txBody>
@@ -2461,14 +3521,57 @@
       </p:sp>
       <p:sp>
         <p:nvSpPr>
+          <p:cNvPr id="7" name="Etiqueta"/>
+          <p:cNvSpPr txBox="1"/>
+          <p:nvPr/>
+        </p:nvSpPr>
+        <p:spPr>
+          <a:xfrm>
+            <a:off x="609600" y="228600"/>
+            <a:ext cx="7315200" cy="914400"/>
+          </a:xfrm>
+          <a:prstGeom prst="rect">
+            <a:avLst/>
+          </a:prstGeom>
+          <a:noFill/>
+        </p:spPr>
+        <p:txBody>
+          <a:bodyPr wrap="square" lIns="0" rIns="0" anchor="b">
+            <a:normAutofit/>
+          </a:bodyPr>
+          <a:lstStyle/>
+          <a:p>
+            <a:r>
+              <a:rPr lang="es-CL" sz="1200" b="1" dirty="0">
+                <a:solidFill>
+                  <a:srgbClr val="0E7490"/>
+                </a:solidFill>
+              </a:rPr>
+              <a:t>CONTENIDO DEL PLAN (TEXTUAL)</a:t>
+            </a:r>
+          </a:p>
+          <a:p>
+            <a:r>
+              <a:rPr lang="es-CL" sz="1200" b="1" dirty="0">
+                <a:solidFill>
+                  <a:srgbClr val="0F3D5E"/>
+                </a:solidFill>
+              </a:rPr>
+              <a:t>TRANSFORMACIÓN DE FORMATOS.</a:t>
+            </a:r>
+          </a:p>
+        </p:txBody>
+      </p:sp>
+      <p:sp>
+        <p:nvSpPr>
           <p:cNvPr id="3" name="Título"/>
           <p:cNvSpPr txBox="1"/>
           <p:nvPr/>
         </p:nvSpPr>
         <p:spPr>
           <a:xfrm>
-            <a:off x="609600" y="381000"/>
-            <a:ext cx="7315200" cy="990600"/>
+            <a:off x="609600" y="1181100"/>
+            <a:ext cx="7315200" cy="685800"/>
           </a:xfrm>
           <a:prstGeom prst="rect">
             <a:avLst/>
@@ -2482,12 +3585,12 @@
           <a:lstStyle/>
           <a:p>
             <a:r>
-              <a:rPr lang="es-CL" sz="3200" b="1" dirty="0">
+              <a:rPr lang="es-CL" sz="2800" b="1" dirty="0">
                 <a:solidFill>
                   <a:srgbClr val="0F3D5E"/>
                 </a:solidFill>
               </a:rPr>
-              <a:t>Supabase en 5 minutos</a:t>
+              <a:t>Formatos</a:t>
             </a:r>
           </a:p>
         </p:txBody>
@@ -2500,7 +3603,7 @@
         </p:nvSpPr>
         <p:spPr>
           <a:xfrm>
-            <a:off x="609600" y="1447800"/>
+            <a:off x="609600" y="1943100"/>
             <a:ext cx="1066800" cy="50800"/>
           </a:xfrm>
           <a:prstGeom prst="rect">
@@ -2522,8 +3625,8 @@
         </p:nvSpPr>
         <p:spPr>
           <a:xfrm>
-            <a:off x="609600" y="1676400"/>
-            <a:ext cx="7315200" cy="4419600"/>
+            <a:off x="609600" y="2095500"/>
+            <a:ext cx="7315200" cy="4000500"/>
           </a:xfrm>
           <a:prstGeom prst="rect">
             <a:avLst/>
@@ -2547,12 +3650,20 @@
               <a:buChar char="•"/>
             </a:pPr>
             <a:r>
+              <a:rPr lang="es-CL" sz="2400" b="1" dirty="0">
+                <a:solidFill>
+                  <a:srgbClr val="1F2937"/>
+                </a:solidFill>
+              </a:rPr>
+              <a:t>JSON</a:t>
+            </a:r>
+            <a:r>
               <a:rPr lang="es-CL" sz="2400" dirty="0">
                 <a:solidFill>
                   <a:srgbClr val="1F2937"/>
                 </a:solidFill>
               </a:rPr>
-              <a:t>Base de datos PostgreSQL en la nube: proyecto → tabla con columnas y tipos → credencial en n8n (URL del proyecto y clave de servicio, que </a:t>
+              <a:t> (nativo de n8n) · </a:t>
             </a:r>
             <a:r>
               <a:rPr lang="es-CL" sz="2400" b="1" dirty="0">
@@ -2560,7 +3671,7 @@
                   <a:srgbClr val="1F2937"/>
                 </a:solidFill>
               </a:rPr>
-              <a:t>nunca</a:t>
+              <a:t>CSV</a:t>
             </a:r>
             <a:r>
               <a:rPr lang="es-CL" sz="2400" dirty="0">
@@ -2568,7 +3679,23 @@
                   <a:srgbClr val="1F2937"/>
                 </a:solidFill>
               </a:rPr>
-              <a:t> se pega en un nodo ni en una captura).</a:t>
+              <a:t> (Extract from File para leerlo, Convert to File para generarlo) · </a:t>
+            </a:r>
+            <a:r>
+              <a:rPr lang="es-CL" sz="2400" b="1" dirty="0">
+                <a:solidFill>
+                  <a:srgbClr val="1F2937"/>
+                </a:solidFill>
+              </a:rPr>
+              <a:t>XML</a:t>
+            </a:r>
+            <a:r>
+              <a:rPr lang="es-CL" sz="2400" dirty="0">
+                <a:solidFill>
+                  <a:srgbClr val="1F2937"/>
+                </a:solidFill>
+              </a:rPr>
+              <a:t> (nodo XML, de JSON a XML y de vuelta).</a:t>
             </a:r>
           </a:p>
         </p:txBody>
@@ -2601,7 +3728,7 @@
                   <a:srgbClr val="6B7280"/>
                 </a:solidFill>
               </a:rPr>
-              <a:t>PF1821 · Módulo 2 · Cápsula 3 · AE3</a:t>
+              <a:t>PF1821 · Módulo 2 · Cápsula 3 · Aprendizaje esperado 3</a:t>
             </a:r>
           </a:p>
         </p:txBody>
@@ -2655,14 +3782,57 @@
       </p:sp>
       <p:sp>
         <p:nvSpPr>
+          <p:cNvPr id="7" name="Etiqueta"/>
+          <p:cNvSpPr txBox="1"/>
+          <p:nvPr/>
+        </p:nvSpPr>
+        <p:spPr>
+          <a:xfrm>
+            <a:off x="609600" y="228600"/>
+            <a:ext cx="7315200" cy="914400"/>
+          </a:xfrm>
+          <a:prstGeom prst="rect">
+            <a:avLst/>
+          </a:prstGeom>
+          <a:noFill/>
+        </p:spPr>
+        <p:txBody>
+          <a:bodyPr wrap="square" lIns="0" rIns="0" anchor="b">
+            <a:normAutofit/>
+          </a:bodyPr>
+          <a:lstStyle/>
+          <a:p>
+            <a:r>
+              <a:rPr lang="es-CL" sz="1200" b="1" dirty="0">
+                <a:solidFill>
+                  <a:srgbClr val="0E7490"/>
+                </a:solidFill>
+              </a:rPr>
+              <a:t>CONTENIDO DEL PLAN (TEXTUAL)</a:t>
+            </a:r>
+          </a:p>
+          <a:p>
+            <a:r>
+              <a:rPr lang="es-CL" sz="1200" b="1" dirty="0">
+                <a:solidFill>
+                  <a:srgbClr val="0F3D5E"/>
+                </a:solidFill>
+              </a:rPr>
+              <a:t>VARIABLES DE ENTORNO.</a:t>
+            </a:r>
+          </a:p>
+        </p:txBody>
+      </p:sp>
+      <p:sp>
+        <p:nvSpPr>
           <p:cNvPr id="3" name="Título"/>
           <p:cNvSpPr txBox="1"/>
           <p:nvPr/>
         </p:nvSpPr>
         <p:spPr>
           <a:xfrm>
-            <a:off x="609600" y="381000"/>
-            <a:ext cx="7315200" cy="990600"/>
+            <a:off x="609600" y="1181100"/>
+            <a:ext cx="7315200" cy="685800"/>
           </a:xfrm>
           <a:prstGeom prst="rect">
             <a:avLst/>
@@ -2676,12 +3846,12 @@
           <a:lstStyle/>
           <a:p>
             <a:r>
-              <a:rPr lang="es-CL" sz="3200" b="1" dirty="0">
+              <a:rPr lang="es-CL" sz="2800" b="1" dirty="0">
                 <a:solidFill>
                   <a:srgbClr val="0F3D5E"/>
                 </a:solidFill>
               </a:rPr>
-              <a:t>CRUD con el nodo Supabase</a:t>
+              <a:t>Variables y configuración</a:t>
             </a:r>
           </a:p>
         </p:txBody>
@@ -2694,7 +3864,7 @@
         </p:nvSpPr>
         <p:spPr>
           <a:xfrm>
-            <a:off x="609600" y="1447800"/>
+            <a:off x="609600" y="1943100"/>
             <a:ext cx="1066800" cy="50800"/>
           </a:xfrm>
           <a:prstGeom prst="rect">
@@ -2716,8 +3886,8 @@
         </p:nvSpPr>
         <p:spPr>
           <a:xfrm>
-            <a:off x="609600" y="1676400"/>
-            <a:ext cx="7315200" cy="4419600"/>
+            <a:off x="609600" y="2095500"/>
+            <a:ext cx="7315200" cy="4000500"/>
           </a:xfrm>
           <a:prstGeom prst="rect">
             <a:avLst/>
@@ -2746,27 +3916,7 @@
                   <a:srgbClr val="1F2937"/>
                 </a:solidFill>
               </a:rPr>
-              <a:t>Create a row · Get a row / Get many rows · Update a row · Delete a row.</a:t>
-            </a:r>
-          </a:p>
-          <a:p>
-            <a:pPr marL="342900" indent="-342900">
-              <a:spcBef>
-                <a:spcPts val="900"/>
-              </a:spcBef>
-              <a:buClr>
-                <a:srgbClr val="0E7490"/>
-              </a:buClr>
-              <a:buFont typeface="Arial"/>
-              <a:buChar char="•"/>
-            </a:pPr>
-            <a:r>
-              <a:rPr lang="es-CL" sz="2400" dirty="0">
-                <a:solidFill>
-                  <a:srgbClr val="1F2937"/>
-                </a:solidFill>
-              </a:rPr>
-              <a:t>Datos relacionales: una devolución guarda el id de su pedido.</a:t>
+              <a:t>Valores que no se escriben a mano en cada nodo: credenciales guardadas y variables del entorno de la instancia, cuando el administrador lo habilita.</a:t>
             </a:r>
           </a:p>
         </p:txBody>
@@ -2799,7 +3949,7 @@
                   <a:srgbClr val="6B7280"/>
                 </a:solidFill>
               </a:rPr>
-              <a:t>PF1821 · Módulo 2 · Cápsula 3 · AE3</a:t>
+              <a:t>PF1821 · Módulo 2 · Cápsula 3 · Aprendizaje esperado 3</a:t>
             </a:r>
           </a:p>
         </p:txBody>
